--- a/assets/pptx/catalog-521.pptx
+++ b/assets/pptx/catalog-521.pptx
@@ -3259,7 +3259,7 @@
                 <a:ea typeface="Ebrima"/>
                 <a:cs typeface="Ebrima"/>
               </a:rPr>
-              <a:t>ግሩም ነህ አንተ ስራህም አያልቅም (2x)</a:t>
+              <a:t>ግሩም ነህ አንተ ስራህም አያልቅም 2x</a:t>
             </a:r>
           </a:p>
           <a:p>
@@ -3295,7 +3295,7 @@
                 <a:ea typeface="Ebrima"/>
                 <a:cs typeface="Ebrima"/>
               </a:rPr>
-              <a:t>እግዚአብሔር አለ በዙፋኑ (2x)</a:t>
+              <a:t>እግዚአብሔር አለ በዙፋኑ 2x</a:t>
             </a:r>
           </a:p>
           <a:p>
@@ -3385,7 +3385,7 @@
                 <a:ea typeface="Ebrima"/>
                 <a:cs typeface="Ebrima"/>
               </a:rPr>
-              <a:t>እግዚአብሔር አለ በዙፋኑ (2x)</a:t>
+              <a:t>እግዚአብሔር አለ በዙፋኑ 2x</a:t>
             </a:r>
           </a:p>
           <a:p>
@@ -3421,7 +3421,7 @@
                 <a:ea typeface="Ebrima"/>
                 <a:cs typeface="Ebrima"/>
               </a:rPr>
-              <a:t>ግሩም ነህ አንተ ስራህም አያልቅም (2x)</a:t>
+              <a:t>ግሩም ነህ አንተ ስራህም አያልቅም 2x</a:t>
             </a:r>
           </a:p>
           <a:p>
@@ -3457,7 +3457,7 @@
                 <a:ea typeface="Ebrima"/>
                 <a:cs typeface="Ebrima"/>
               </a:rPr>
-              <a:t>እግዚአብሔር አለ በዙፋኑ (2x)</a:t>
+              <a:t>እግዚአብሔር አለ በዙፋኑ 2x</a:t>
             </a:r>
           </a:p>
           <a:p>
@@ -3547,7 +3547,7 @@
                 <a:ea typeface="Ebrima"/>
                 <a:cs typeface="Ebrima"/>
               </a:rPr>
-              <a:t>እግዚአብሔር አለ በዙፋኑ (2x)</a:t>
+              <a:t>እግዚአብሔር አለ በዙፋኑ 2x</a:t>
             </a:r>
           </a:p>
           <a:p>
@@ -3583,7 +3583,7 @@
                 <a:ea typeface="Ebrima"/>
                 <a:cs typeface="Ebrima"/>
               </a:rPr>
-              <a:t>ግሩም ነህ አንተ ስራህም አያልቅም (2x)</a:t>
+              <a:t>ግሩም ነህ አንተ ስራህም አያልቅም 2x</a:t>
             </a:r>
           </a:p>
           <a:p>
@@ -3619,7 +3619,7 @@
                 <a:ea typeface="Ebrima"/>
                 <a:cs typeface="Ebrima"/>
               </a:rPr>
-              <a:t>እግዚአብሔር አለ በዙፋኑ (2x)</a:t>
+              <a:t>እግዚአብሔር አለ በዙፋኑ 2x</a:t>
             </a:r>
           </a:p>
           <a:p>
@@ -3709,7 +3709,7 @@
                 <a:ea typeface="Ebrima"/>
                 <a:cs typeface="Ebrima"/>
               </a:rPr>
-              <a:t>እግዚአብሔር አለ በዙፋኑ (2x)</a:t>
+              <a:t>እግዚአብሔር አለ በዙፋኑ 2x</a:t>
             </a:r>
           </a:p>
           <a:p>
@@ -3745,7 +3745,7 @@
                 <a:ea typeface="Ebrima"/>
                 <a:cs typeface="Ebrima"/>
               </a:rPr>
-              <a:t>ግሩም ነህ አንተ ስራህም አያልቅም (2x)</a:t>
+              <a:t>ግሩም ነህ አንተ ስራህም አያልቅም 2x</a:t>
             </a:r>
           </a:p>
           <a:p>
@@ -3781,7 +3781,7 @@
                 <a:ea typeface="Ebrima"/>
                 <a:cs typeface="Ebrima"/>
               </a:rPr>
-              <a:t>እግዚአብሔር አለ በዙፋኑ (2x)</a:t>
+              <a:t>እግዚአብሔር አለ በዙፋኑ 2x</a:t>
             </a:r>
           </a:p>
           <a:p>
@@ -3889,7 +3889,7 @@
                 <a:ea typeface="Ebrima"/>
                 <a:cs typeface="Ebrima"/>
               </a:rPr>
-              <a:t>እግዚአብሔር አለ በዙፋኑ (2x)</a:t>
+              <a:t>እግዚአብሔር አለ በዙፋኑ 2x</a:t>
             </a:r>
           </a:p>
           <a:p>
@@ -3925,7 +3925,7 @@
                 <a:ea typeface="Ebrima"/>
                 <a:cs typeface="Ebrima"/>
               </a:rPr>
-              <a:t>ግሩም ነህ አንተ ስራህም አያልቅም (2x)</a:t>
+              <a:t>ግሩም ነህ አንተ ስራህም አያልቅም 2x</a:t>
             </a:r>
           </a:p>
           <a:p>
@@ -3961,7 +3961,7 @@
                 <a:ea typeface="Ebrima"/>
                 <a:cs typeface="Ebrima"/>
               </a:rPr>
-              <a:t>እግዚአብሔር አለ በዙፋኑ (2x)</a:t>
+              <a:t>እግዚአብሔር አለ በዙፋኑ 2x</a:t>
             </a:r>
           </a:p>
           <a:p>
@@ -4105,7 +4105,7 @@
                 <a:ea typeface="Ebrima"/>
                 <a:cs typeface="Ebrima"/>
               </a:rPr>
-              <a:t>እግዚአብሔር አለ በዙፋኑ (2x)</a:t>
+              <a:t>እግዚአብሔር አለ በዙፋኑ 2x</a:t>
             </a:r>
           </a:p>
           <a:p>
@@ -4141,7 +4141,7 @@
                 <a:ea typeface="Ebrima"/>
                 <a:cs typeface="Ebrima"/>
               </a:rPr>
-              <a:t>ግሩም ነህ አንተ ስራህም አያልቅም (2x)</a:t>
+              <a:t>ግሩም ነህ አንተ ስራህም አያልቅም 2x</a:t>
             </a:r>
           </a:p>
         </p:txBody>
